--- a/assets/powerpoints/module-n3-vetements/C2-plus-cher-moins-cher-aussi-cher.pptx
+++ b/assets/powerpoints/module-n3-vetements/C2-plus-cher-moins-cher-aussi-cher.pptx
@@ -8974,7 +8974,25 @@
                 </a:solidFill>
                 <a:latin typeface="Verdana"/>
               </a:rPr>
-              <a:t>« Les bottes sont moins chères &lt;b&gt;que le manteau&lt;/b&gt;. »</a:t>
+              <a:t>« Les bottes sont moins chères </a:t>
+            </a:r>
+            <a:r>
+              <a:rPr sz="3400" b="1" i="0">
+                <a:solidFill>
+                  <a:srgbClr val="17181A"/>
+                </a:solidFill>
+                <a:latin typeface="Verdana"/>
+              </a:rPr>
+              <a:t>que le manteau</a:t>
+            </a:r>
+            <a:r>
+              <a:rPr sz="3400" b="0" i="0">
+                <a:solidFill>
+                  <a:srgbClr val="17181A"/>
+                </a:solidFill>
+                <a:latin typeface="Verdana"/>
+              </a:rPr>
+              <a:t>. »</a:t>
             </a:r>
           </a:p>
         </p:txBody>
@@ -9909,7 +9927,34 @@
                 </a:solidFill>
                 <a:latin typeface="Verdana"/>
               </a:rPr>
-              <a:t>bon donne &lt;b&gt;meilleur&lt;/b&gt; · bien donne &lt;b&gt;mieux&lt;/b&gt;</a:t>
+              <a:t>bon donne </a:t>
+            </a:r>
+            <a:r>
+              <a:rPr sz="3400" b="1" i="0">
+                <a:solidFill>
+                  <a:srgbClr val="17181A"/>
+                </a:solidFill>
+                <a:latin typeface="Verdana"/>
+              </a:rPr>
+              <a:t>meilleur</a:t>
+            </a:r>
+            <a:r>
+              <a:rPr sz="3400" b="0" i="0">
+                <a:solidFill>
+                  <a:srgbClr val="17181A"/>
+                </a:solidFill>
+                <a:latin typeface="Verdana"/>
+              </a:rPr>
+              <a:t> · bien donne </a:t>
+            </a:r>
+            <a:r>
+              <a:rPr sz="3400" b="1" i="0">
+                <a:solidFill>
+                  <a:srgbClr val="17181A"/>
+                </a:solidFill>
+                <a:latin typeface="Verdana"/>
+              </a:rPr>
+              <a:t>mieux</a:t>
             </a:r>
           </a:p>
         </p:txBody>
@@ -9994,7 +10039,25 @@
                 </a:solidFill>
                 <a:latin typeface="Verdana"/>
               </a:rPr>
-              <a:t>« Plus bon » n'existe pas. On dit « la laine est &lt;b&gt;meilleure&lt;/b&gt; que l'acrylique ». Et « meilleur » s'accorde comme un adjectif ordinaire : meilleur, meilleure, meilleurs, meilleures. Ce sont les deux seules irrégularités de ce niveau.</a:t>
+              <a:t>« Plus bon » n'existe pas. On dit « la laine est </a:t>
+            </a:r>
+            <a:r>
+              <a:rPr sz="2000" b="1" i="0">
+                <a:solidFill>
+                  <a:srgbClr val="4B4F52"/>
+                </a:solidFill>
+                <a:latin typeface="Verdana"/>
+              </a:rPr>
+              <a:t>meilleure</a:t>
+            </a:r>
+            <a:r>
+              <a:rPr sz="2000" b="0" i="0">
+                <a:solidFill>
+                  <a:srgbClr val="4B4F52"/>
+                </a:solidFill>
+                <a:latin typeface="Verdana"/>
+              </a:rPr>
+              <a:t> que l'acrylique ». Et « meilleur » s'accorde comme un adjectif ordinaire : meilleur, meilleure, meilleurs, meilleures. Ce sont les deux seules irrégularités de ce niveau.</a:t>
             </a:r>
           </a:p>
         </p:txBody>
